--- a/presentation/SIH2026_WellDrop_SENTRA_PS26165.pptx
+++ b/presentation/SIH2026_WellDrop_SENTRA_PS26165.pptx
@@ -8088,7 +8088,7 @@
         <p:spPr>
           <a:xfrm>
             <a:off x="6263640" y="3803904"/>
-            <a:ext cx="5532120" cy="402336"/>
+            <a:ext cx="5532120" cy="457200"/>
           </a:xfrm>
           <a:prstGeom prst="roundRect">
             <a:avLst>
@@ -8135,7 +8135,7 @@
         </p:nvSpPr>
         <p:spPr>
           <a:xfrm>
-            <a:off x="6373368" y="3886200"/>
+            <a:off x="6373368" y="3913632"/>
             <a:ext cx="237744" cy="237744"/>
           </a:xfrm>
           <a:prstGeom prst="ellipse">
@@ -8189,7 +8189,7 @@
         <p:spPr>
           <a:xfrm>
             <a:off x="6720840" y="3849624"/>
-            <a:ext cx="4965192" cy="310896"/>
+            <a:ext cx="4965192" cy="365760"/>
           </a:xfrm>
           <a:prstGeom prst="rect">
             <a:avLst/>
@@ -8236,8 +8236,8 @@
         </p:nvSpPr>
         <p:spPr>
           <a:xfrm>
-            <a:off x="6263640" y="4251960"/>
-            <a:ext cx="5532120" cy="402336"/>
+            <a:off x="6263640" y="4306824"/>
+            <a:ext cx="5532120" cy="457200"/>
           </a:xfrm>
           <a:prstGeom prst="roundRect">
             <a:avLst>
@@ -8284,7 +8284,7 @@
         </p:nvSpPr>
         <p:spPr>
           <a:xfrm>
-            <a:off x="6373368" y="4334256"/>
+            <a:off x="6373368" y="4416552"/>
             <a:ext cx="237744" cy="237744"/>
           </a:xfrm>
           <a:prstGeom prst="ellipse">
@@ -8337,8 +8337,8 @@
         </p:nvSpPr>
         <p:spPr>
           <a:xfrm>
-            <a:off x="6720840" y="4297680"/>
-            <a:ext cx="4965192" cy="310896"/>
+            <a:off x="6720840" y="4352544"/>
+            <a:ext cx="4965192" cy="365760"/>
           </a:xfrm>
           <a:prstGeom prst="rect">
             <a:avLst/>
@@ -8372,7 +8372,7 @@
                 </a:solidFill>
                 <a:latin typeface="Calibri"/>
               </a:rPr>
-              <a:t>zero-shot prototypes lift recall on paraphrase</a:t>
+              <a:t>zero-shot prototypes lift recall</a:t>
             </a:r>
           </a:p>
         </p:txBody>
@@ -8385,8 +8385,8 @@
         </p:nvSpPr>
         <p:spPr>
           <a:xfrm>
-            <a:off x="6263640" y="4700016"/>
-            <a:ext cx="5532120" cy="402336"/>
+            <a:off x="6263640" y="4809744"/>
+            <a:ext cx="5532120" cy="457200"/>
           </a:xfrm>
           <a:prstGeom prst="roundRect">
             <a:avLst>
@@ -8433,7 +8433,7 @@
         </p:nvSpPr>
         <p:spPr>
           <a:xfrm>
-            <a:off x="6373368" y="4782312"/>
+            <a:off x="6373368" y="4919472"/>
             <a:ext cx="237744" cy="237744"/>
           </a:xfrm>
           <a:prstGeom prst="ellipse">
@@ -8486,8 +8486,8 @@
         </p:nvSpPr>
         <p:spPr>
           <a:xfrm>
-            <a:off x="6720840" y="4745736"/>
-            <a:ext cx="4965192" cy="310896"/>
+            <a:off x="6720840" y="4855464"/>
+            <a:ext cx="4965192" cy="365760"/>
           </a:xfrm>
           <a:prstGeom prst="rect">
             <a:avLst/>
@@ -8534,8 +8534,8 @@
         </p:nvSpPr>
         <p:spPr>
           <a:xfrm>
-            <a:off x="6263640" y="5148072"/>
-            <a:ext cx="5532120" cy="402336"/>
+            <a:off x="6263640" y="5312664"/>
+            <a:ext cx="5532120" cy="457200"/>
           </a:xfrm>
           <a:prstGeom prst="roundRect">
             <a:avLst>
@@ -8582,7 +8582,7 @@
         </p:nvSpPr>
         <p:spPr>
           <a:xfrm>
-            <a:off x="6373368" y="5230368"/>
+            <a:off x="6373368" y="5422392"/>
             <a:ext cx="237744" cy="237744"/>
           </a:xfrm>
           <a:prstGeom prst="ellipse">
@@ -8635,8 +8635,8 @@
         </p:nvSpPr>
         <p:spPr>
           <a:xfrm>
-            <a:off x="6720840" y="5193792"/>
-            <a:ext cx="4965192" cy="310896"/>
+            <a:off x="6720840" y="5358383"/>
+            <a:ext cx="4965192" cy="365760"/>
           </a:xfrm>
           <a:prstGeom prst="rect">
             <a:avLst/>
@@ -8683,7 +8683,7 @@
         </p:nvSpPr>
         <p:spPr>
           <a:xfrm>
-            <a:off x="6263640" y="5596128"/>
+            <a:off x="6263640" y="5797296"/>
             <a:ext cx="5532120" cy="566928"/>
           </a:xfrm>
           <a:prstGeom prst="roundRect">
@@ -8731,7 +8731,7 @@
         </p:nvSpPr>
         <p:spPr>
           <a:xfrm>
-            <a:off x="6409944" y="5669280"/>
+            <a:off x="6409944" y="5870448"/>
             <a:ext cx="5239512" cy="457200"/>
           </a:xfrm>
           <a:prstGeom prst="rect">
@@ -8766,7 +8766,7 @@
                 </a:solidFill>
                 <a:latin typeface="Calibri"/>
               </a:rPr>
-              <a:t>if an encoder scores every prototype alike, its ranking is ignored and the rules decide — verified against a deliberately degenerate model.</a:t>
+              <a:t>if an encoder scores every prototype alike, its ranking is ignored and the rules decide.</a:t>
             </a:r>
           </a:p>
         </p:txBody>
